--- a/classes/parte-7-red-team-y-operaciones-ofensivas/167-acceso-inicial-tecnicas/clase-167-presentacion.pptx
+++ b/classes/parte-7-red-team-y-operaciones-ofensivas/167-acceso-inicial-tecnicas/clase-167-presentacion.pptx
@@ -17,6 +17,9 @@
     <p:sldId id="265" r:id="rId16"/>
     <p:sldId id="266" r:id="rId17"/>
     <p:sldId id="267" r:id="rId18"/>
+    <p:sldId id="268" r:id="rId19"/>
+    <p:sldId id="269" r:id="rId20"/>
+    <p:sldId id="270" r:id="rId21"/>
   </p:sldIdLst>
   <p:sldSz cx="9144000" cy="6858000" type="screen4x3"/>
   <p:notesSz cx="6858000" cy="9144000"/>
@@ -3198,7 +3201,7 @@
                   <a:srgbClr val="0B3D2E"/>
                 </a:solidFill>
               </a:rPr>
-              <a:t>⚠️ Errores comunes</a:t>
+              <a:t>✍️ Ejercicios</a:t>
             </a:r>
           </a:p>
         </p:txBody>
@@ -3236,67 +3239,82 @@
                   <a:srgbClr val="22282E"/>
                 </a:solidFill>
               </a:rPr>
-              <a:t>•  Cuentas bloqueadas masivamente — Spraying demasiado agresivo; una contraseña por ventana de lockout</a:t>
-            </a:r>
-          </a:p>
-          <a:p>
-            <a:pPr>
-              <a:spcAft>
-                <a:spcPts val="600"/>
-              </a:spcAft>
-            </a:pPr>
-            <a:r>
-              <a:rPr sz="1500">
-                <a:solidFill>
-                  <a:srgbClr val="22282E"/>
-                </a:solidFill>
-              </a:rPr>
-              <a:t>•  El exploit no funciona — Versión distinta o WAF; confirma versión y ajusta el payload</a:t>
-            </a:r>
-          </a:p>
-          <a:p>
-            <a:pPr>
-              <a:spcAft>
-                <a:spcPts val="600"/>
-              </a:spcAft>
-            </a:pPr>
-            <a:r>
-              <a:rPr sz="1500">
-                <a:solidFill>
-                  <a:srgbClr val="22282E"/>
-                </a:solidFill>
-              </a:rPr>
-              <a:t>•  Login válido pero sin acceso remoto — El usuario no tiene WinRM/RDP; prueba otro protocolo o usuario</a:t>
-            </a:r>
-          </a:p>
-          <a:p>
-            <a:pPr>
-              <a:spcAft>
-                <a:spcPts val="600"/>
-              </a:spcAft>
-            </a:pPr>
-            <a:r>
-              <a:rPr sz="1500">
-                <a:solidFill>
-                  <a:srgbClr val="22282E"/>
-                </a:solidFill>
-              </a:rPr>
-              <a:t>•  Foothold se pierde al cerrar sesión — Falta persistencia; se añade en post-explotación</a:t>
-            </a:r>
-          </a:p>
-          <a:p>
-            <a:pPr>
-              <a:spcAft>
-                <a:spcPts val="600"/>
-              </a:spcAft>
-            </a:pPr>
-            <a:r>
-              <a:rPr sz="1500">
-                <a:solidFill>
-                  <a:srgbClr val="22282E"/>
-                </a:solidFill>
-              </a:rPr>
-              <a:t>•  Detección inmediata — Vector ruidoso; elige credenciales válidas cuando el sigilo importa</a:t>
+              <a:t>•  Lista 6 técnicas de Initial Access con su ID de ATT&amp;CK.</a:t>
+            </a:r>
+          </a:p>
+          <a:p>
+            <a:pPr>
+              <a:spcAft>
+                <a:spcPts val="600"/>
+              </a:spcAft>
+            </a:pPr>
+            <a:r>
+              <a:rPr sz="1500">
+                <a:solidFill>
+                  <a:srgbClr val="22282E"/>
+                </a:solidFill>
+              </a:rPr>
+              <a:t>•  Explica por qué Valid Accounts es más sigiloso que explotar un servicio.</a:t>
+            </a:r>
+          </a:p>
+          <a:p>
+            <a:pPr>
+              <a:spcAft>
+                <a:spcPts val="600"/>
+              </a:spcAft>
+            </a:pPr>
+            <a:r>
+              <a:rPr sz="1500">
+                <a:solidFill>
+                  <a:srgbClr val="22282E"/>
+                </a:solidFill>
+              </a:rPr>
+              <a:t>•  Diseña una campaña de password spraying que no bloquee cuentas (calcula el timing según la política de lockout).</a:t>
+            </a:r>
+          </a:p>
+          <a:p>
+            <a:pPr>
+              <a:spcAft>
+                <a:spcPts val="600"/>
+              </a:spcAft>
+            </a:pPr>
+            <a:r>
+              <a:rPr sz="1500">
+                <a:solidFill>
+                  <a:srgbClr val="22282E"/>
+                </a:solidFill>
+              </a:rPr>
+              <a:t>•  Compara el riesgo de detección de T1190 frente a T1078.</a:t>
+            </a:r>
+          </a:p>
+          <a:p>
+            <a:pPr>
+              <a:spcAft>
+                <a:spcPts val="600"/>
+              </a:spcAft>
+            </a:pPr>
+            <a:r>
+              <a:rPr sz="1500">
+                <a:solidFill>
+                  <a:srgbClr val="22282E"/>
+                </a:solidFill>
+              </a:rPr>
+              <a:t>•  Consigue un foothold en el lab por dos vectores distintos y compáralos.</a:t>
+            </a:r>
+          </a:p>
+          <a:p>
+            <a:pPr>
+              <a:spcAft>
+                <a:spcPts val="600"/>
+              </a:spcAft>
+            </a:pPr>
+            <a:r>
+              <a:rPr sz="1500">
+                <a:solidFill>
+                  <a:srgbClr val="22282E"/>
+                </a:solidFill>
+              </a:rPr>
+              <a:t>•  Investiga un caso real de acceso inicial por supply chain y resúmelo.</a:t>
             </a:r>
           </a:p>
         </p:txBody>
@@ -3347,7 +3365,7 @@
                   <a:srgbClr val="0B3D2E"/>
                 </a:solidFill>
               </a:rPr>
-              <a:t>❓ Preguntas frecuentes</a:t>
+              <a:t>📝 Reto verificable</a:t>
             </a:r>
           </a:p>
         </p:txBody>
@@ -3385,82 +3403,22 @@
                   <a:srgbClr val="22282E"/>
                 </a:solidFill>
               </a:rPr>
-              <a:t>•  ❓ ¿Cuál es el vector más común hoy?</a:t>
-            </a:r>
-          </a:p>
-          <a:p>
-            <a:pPr>
-              <a:spcAft>
-                <a:spcPts val="600"/>
-              </a:spcAft>
-            </a:pPr>
-            <a:r>
-              <a:rPr sz="1500">
-                <a:solidFill>
-                  <a:srgbClr val="22282E"/>
-                </a:solidFill>
-              </a:rPr>
-              <a:t>•  Servicios remotos expuestos con credenciales válidas (a menudo filtradas) y explotación de aplicaciones públicas sin parchear compiten con el phishing por el primer puesto.</a:t>
-            </a:r>
-          </a:p>
-          <a:p>
-            <a:pPr>
-              <a:spcAft>
-                <a:spcPts val="600"/>
-              </a:spcAft>
-            </a:pPr>
-            <a:r>
-              <a:rPr sz="1500">
-                <a:solidFill>
-                  <a:srgbClr val="22282E"/>
-                </a:solidFill>
-              </a:rPr>
-              <a:t>•  ❓ ¿El password spraying es detectable?</a:t>
-            </a:r>
-          </a:p>
-          <a:p>
-            <a:pPr>
-              <a:spcAft>
-                <a:spcPts val="600"/>
-              </a:spcAft>
-            </a:pPr>
-            <a:r>
-              <a:rPr sz="1500">
-                <a:solidFill>
-                  <a:srgbClr val="22282E"/>
-                </a:solidFill>
-              </a:rPr>
-              <a:t>•  Sí, genera muchos logins fallidos distribuidos; por eso se hace lento y con pocas contraseñas. Aún así, un SOC atento lo detecta.</a:t>
-            </a:r>
-          </a:p>
-          <a:p>
-            <a:pPr>
-              <a:spcAft>
-                <a:spcPts val="600"/>
-              </a:spcAft>
-            </a:pPr>
-            <a:r>
-              <a:rPr sz="1500">
-                <a:solidFill>
-                  <a:srgbClr val="22282E"/>
-                </a:solidFill>
-              </a:rPr>
-              <a:t>•  ❓ ¿Por qué preferir credenciales válidas?</a:t>
-            </a:r>
-          </a:p>
-          <a:p>
-            <a:pPr>
-              <a:spcAft>
-                <a:spcPts val="600"/>
-              </a:spcAft>
-            </a:pPr>
-            <a:r>
-              <a:rPr sz="1500">
-                <a:solidFill>
-                  <a:srgbClr val="22282E"/>
-                </a:solidFill>
-              </a:rPr>
-              <a:t>•  Porque un login legítimo genera poca telemetría anómala frente a un exploit ruidoso; es el vector más "limpio" para el foothold.</a:t>
+              <a:t>•  Obtén un foothold con sesión C2 en una máquina de tu laboratorio a través de un vector de Initial Access que no sea phishing, documentando la técnica ATT&amp;CK usada.</a:t>
+            </a:r>
+          </a:p>
+          <a:p>
+            <a:pPr>
+              <a:spcAft>
+                <a:spcPts val="600"/>
+              </a:spcAft>
+            </a:pPr>
+            <a:r>
+              <a:rPr sz="1500">
+                <a:solidFill>
+                  <a:srgbClr val="22282E"/>
+                </a:solidFill>
+              </a:rPr>
+              <a:t>•  Criterio de aceptación: existe una sesión C2 activa originada por el vector elegido (servicio expuesto o credenciales válidas), presentas el ID ATT&amp;CK correspondiente y explicas cómo evitaste…</a:t>
             </a:r>
           </a:p>
         </p:txBody>
@@ -3511,7 +3469,7 @@
                   <a:srgbClr val="0B3D2E"/>
                 </a:solidFill>
               </a:rPr>
-              <a:t>🔗 Referencias</a:t>
+              <a:t>⚠️ Errores comunes</a:t>
             </a:r>
           </a:p>
         </p:txBody>
@@ -3549,56 +3507,459 @@
                   <a:srgbClr val="22282E"/>
                 </a:solidFill>
               </a:rPr>
-              <a:t>•  MITRE ATT&amp;CK — Initial Access (TA0001). &lt;https://attack.mitre.org/tactics/TA0001/&gt;</a:t>
-            </a:r>
-          </a:p>
-          <a:p>
-            <a:pPr>
-              <a:spcAft>
-                <a:spcPts val="600"/>
-              </a:spcAft>
-            </a:pPr>
-            <a:r>
-              <a:rPr sz="1500">
-                <a:solidFill>
-                  <a:srgbClr val="22282E"/>
-                </a:solidFill>
-              </a:rPr>
-              <a:t>•  NetExec (nxc). &lt;https://github.com/Pennyw0rth/NetExec&gt;</a:t>
-            </a:r>
-          </a:p>
-          <a:p>
-            <a:pPr>
-              <a:spcAft>
-                <a:spcPts val="600"/>
-              </a:spcAft>
-            </a:pPr>
-            <a:r>
-              <a:rPr sz="1500">
-                <a:solidFill>
-                  <a:srgbClr val="22282E"/>
-                </a:solidFill>
-              </a:rPr>
-              <a:t>•  kerbrute. &lt;https://github.com/ropnop/kerbrute&gt;</a:t>
-            </a:r>
-          </a:p>
-          <a:p>
-            <a:pPr>
-              <a:spcAft>
-                <a:spcPts val="600"/>
-              </a:spcAft>
-            </a:pPr>
-            <a:r>
-              <a:rPr sz="1500">
-                <a:solidFill>
-                  <a:srgbClr val="22282E"/>
-                </a:solidFill>
-              </a:rPr>
-              <a:t>•  Clark, B. — RTFM: Red Team Field Manual v2.</a:t>
-            </a:r>
-          </a:p>
-        </p:txBody>
-      </p:sp>
+              <a:t>•  Cuentas bloqueadas masivamente — Spraying demasiado agresivo; una contraseña por ventana de lockout</a:t>
+            </a:r>
+          </a:p>
+          <a:p>
+            <a:pPr>
+              <a:spcAft>
+                <a:spcPts val="600"/>
+              </a:spcAft>
+            </a:pPr>
+            <a:r>
+              <a:rPr sz="1500">
+                <a:solidFill>
+                  <a:srgbClr val="22282E"/>
+                </a:solidFill>
+              </a:rPr>
+              <a:t>•  El exploit no funciona — Versión distinta o WAF; confirma versión y ajusta el payload</a:t>
+            </a:r>
+          </a:p>
+          <a:p>
+            <a:pPr>
+              <a:spcAft>
+                <a:spcPts val="600"/>
+              </a:spcAft>
+            </a:pPr>
+            <a:r>
+              <a:rPr sz="1500">
+                <a:solidFill>
+                  <a:srgbClr val="22282E"/>
+                </a:solidFill>
+              </a:rPr>
+              <a:t>•  Login válido pero sin acceso remoto — El usuario no tiene WinRM/RDP; prueba otro protocolo o usuario</a:t>
+            </a:r>
+          </a:p>
+          <a:p>
+            <a:pPr>
+              <a:spcAft>
+                <a:spcPts val="600"/>
+              </a:spcAft>
+            </a:pPr>
+            <a:r>
+              <a:rPr sz="1500">
+                <a:solidFill>
+                  <a:srgbClr val="22282E"/>
+                </a:solidFill>
+              </a:rPr>
+              <a:t>•  Foothold se pierde al cerrar sesión — Falta persistencia; se añade en post-explotación</a:t>
+            </a:r>
+          </a:p>
+          <a:p>
+            <a:pPr>
+              <a:spcAft>
+                <a:spcPts val="600"/>
+              </a:spcAft>
+            </a:pPr>
+            <a:r>
+              <a:rPr sz="1500">
+                <a:solidFill>
+                  <a:srgbClr val="22282E"/>
+                </a:solidFill>
+              </a:rPr>
+              <a:t>•  Detección inmediata — Vector ruidoso; elige credenciales válidas cuando el sigilo importa</a:t>
+            </a:r>
+          </a:p>
+        </p:txBody>
+      </p:sp>
+    </p:spTree>
+  </p:cSld>
+  <p:clrMapOvr>
+    <a:masterClrMapping/>
+  </p:clrMapOvr>
+</p:sld>
+</file>
+
+<file path=ppt/slides/slide13.xml><?xml version="1.0" encoding="utf-8"?>
+<p:sld xmlns:a="http://schemas.openxmlformats.org/drawingml/2006/main" xmlns:p="http://schemas.openxmlformats.org/presentationml/2006/main" xmlns:r="http://schemas.openxmlformats.org/officeDocument/2006/relationships">
+  <p:cSld>
+    <p:spTree>
+      <p:nvGrpSpPr>
+        <p:cNvPr id="1" name=""/>
+        <p:cNvGrpSpPr/>
+        <p:nvPr/>
+      </p:nvGrpSpPr>
+      <p:grpSpPr/>
+      <p:sp>
+        <p:nvSpPr>
+          <p:cNvPr id="2" name="TextBox 1"/>
+          <p:cNvSpPr txBox="1"/>
+          <p:nvPr/>
+        </p:nvSpPr>
+        <p:spPr>
+          <a:xfrm>
+            <a:off x="457200" y="320040"/>
+            <a:ext cx="8229600" cy="822960"/>
+          </a:xfrm>
+          <a:prstGeom prst="rect">
+            <a:avLst/>
+          </a:prstGeom>
+          <a:noFill/>
+        </p:spPr>
+        <p:txBody>
+          <a:bodyPr wrap="square">
+            <a:spAutoFit/>
+          </a:bodyPr>
+          <a:lstStyle/>
+          <a:p>
+            <a:r>
+              <a:rPr sz="2600" b="1">
+                <a:solidFill>
+                  <a:srgbClr val="0B3D2E"/>
+                </a:solidFill>
+              </a:rPr>
+              <a:t>❓ Preguntas frecuentes</a:t>
+            </a:r>
+          </a:p>
+        </p:txBody>
+      </p:sp>
+      <p:sp>
+        <p:nvSpPr>
+          <p:cNvPr id="3" name="TextBox 2"/>
+          <p:cNvSpPr txBox="1"/>
+          <p:nvPr/>
+        </p:nvSpPr>
+        <p:spPr>
+          <a:xfrm>
+            <a:off x="457200" y="1280160"/>
+            <a:ext cx="8229600" cy="4937760"/>
+          </a:xfrm>
+          <a:prstGeom prst="rect">
+            <a:avLst/>
+          </a:prstGeom>
+          <a:noFill/>
+        </p:spPr>
+        <p:txBody>
+          <a:bodyPr wrap="square">
+            <a:spAutoFit/>
+          </a:bodyPr>
+          <a:lstStyle/>
+          <a:p>
+            <a:pPr>
+              <a:spcAft>
+                <a:spcPts val="600"/>
+              </a:spcAft>
+            </a:pPr>
+            <a:r>
+              <a:rPr sz="1500">
+                <a:solidFill>
+                  <a:srgbClr val="22282E"/>
+                </a:solidFill>
+              </a:rPr>
+              <a:t>•  ❓ ¿Cuál es el vector más común hoy?</a:t>
+            </a:r>
+          </a:p>
+          <a:p>
+            <a:pPr>
+              <a:spcAft>
+                <a:spcPts val="600"/>
+              </a:spcAft>
+            </a:pPr>
+            <a:r>
+              <a:rPr sz="1500">
+                <a:solidFill>
+                  <a:srgbClr val="22282E"/>
+                </a:solidFill>
+              </a:rPr>
+              <a:t>•  No existe un ranking universal: cambia según sector, periodo, fuente de incidentes y taxonomía. La evaluación debe usar inteligencia reciente y relevante para la organización, no asumir que el vector…</a:t>
+            </a:r>
+          </a:p>
+          <a:p>
+            <a:pPr>
+              <a:spcAft>
+                <a:spcPts val="600"/>
+              </a:spcAft>
+            </a:pPr>
+            <a:r>
+              <a:rPr sz="1500">
+                <a:solidFill>
+                  <a:srgbClr val="22282E"/>
+                </a:solidFill>
+              </a:rPr>
+              <a:t>•  ❓ ¿El password spraying es detectable?</a:t>
+            </a:r>
+          </a:p>
+          <a:p>
+            <a:pPr>
+              <a:spcAft>
+                <a:spcPts val="600"/>
+              </a:spcAft>
+            </a:pPr>
+            <a:r>
+              <a:rPr sz="1500">
+                <a:solidFill>
+                  <a:srgbClr val="22282E"/>
+                </a:solidFill>
+              </a:rPr>
+              <a:t>•  Sí, genera muchos logins fallidos distribuidos; por eso se hace lento y con pocas contraseñas. Aún así, un SOC atento lo detecta.</a:t>
+            </a:r>
+          </a:p>
+          <a:p>
+            <a:pPr>
+              <a:spcAft>
+                <a:spcPts val="600"/>
+              </a:spcAft>
+            </a:pPr>
+            <a:r>
+              <a:rPr sz="1500">
+                <a:solidFill>
+                  <a:srgbClr val="22282E"/>
+                </a:solidFill>
+              </a:rPr>
+              <a:t>•  ❓ ¿Por qué preferir credenciales válidas?</a:t>
+            </a:r>
+          </a:p>
+          <a:p>
+            <a:pPr>
+              <a:spcAft>
+                <a:spcPts val="600"/>
+              </a:spcAft>
+            </a:pPr>
+            <a:r>
+              <a:rPr sz="1500">
+                <a:solidFill>
+                  <a:srgbClr val="22282E"/>
+                </a:solidFill>
+              </a:rPr>
+              <a:t>•  Porque evita explotar software y puede parecerse al uso esperado. Aun así, genera telemetría de identidad y puede ser muy anómalo por origen, dispositivo, horario, MFA o secuencia de accesos.</a:t>
+            </a:r>
+          </a:p>
+        </p:txBody>
+      </p:sp>
+    </p:spTree>
+  </p:cSld>
+  <p:clrMapOvr>
+    <a:masterClrMapping/>
+  </p:clrMapOvr>
+</p:sld>
+</file>
+
+<file path=ppt/slides/slide14.xml><?xml version="1.0" encoding="utf-8"?>
+<p:sld xmlns:a="http://schemas.openxmlformats.org/drawingml/2006/main" xmlns:p="http://schemas.openxmlformats.org/presentationml/2006/main" xmlns:r="http://schemas.openxmlformats.org/officeDocument/2006/relationships">
+  <p:cSld>
+    <p:spTree>
+      <p:nvGrpSpPr>
+        <p:cNvPr id="1" name=""/>
+        <p:cNvGrpSpPr/>
+        <p:nvPr/>
+      </p:nvGrpSpPr>
+      <p:grpSpPr/>
+      <p:sp>
+        <p:nvSpPr>
+          <p:cNvPr id="2" name="TextBox 1"/>
+          <p:cNvSpPr txBox="1"/>
+          <p:nvPr/>
+        </p:nvSpPr>
+        <p:spPr>
+          <a:xfrm>
+            <a:off x="457200" y="320040"/>
+            <a:ext cx="8229600" cy="822960"/>
+          </a:xfrm>
+          <a:prstGeom prst="rect">
+            <a:avLst/>
+          </a:prstGeom>
+          <a:noFill/>
+        </p:spPr>
+        <p:txBody>
+          <a:bodyPr wrap="square">
+            <a:spAutoFit/>
+          </a:bodyPr>
+          <a:lstStyle/>
+          <a:p>
+            <a:r>
+              <a:rPr sz="2600" b="1">
+                <a:solidFill>
+                  <a:srgbClr val="0B3D2E"/>
+                </a:solidFill>
+              </a:rPr>
+              <a:t>🔗 Referencias</a:t>
+            </a:r>
+          </a:p>
+        </p:txBody>
+      </p:sp>
+      <p:sp>
+        <p:nvSpPr>
+          <p:cNvPr id="3" name="TextBox 2"/>
+          <p:cNvSpPr txBox="1"/>
+          <p:nvPr/>
+        </p:nvSpPr>
+        <p:spPr>
+          <a:xfrm>
+            <a:off x="457200" y="1280160"/>
+            <a:ext cx="8229600" cy="4937760"/>
+          </a:xfrm>
+          <a:prstGeom prst="rect">
+            <a:avLst/>
+          </a:prstGeom>
+          <a:noFill/>
+        </p:spPr>
+        <p:txBody>
+          <a:bodyPr wrap="square">
+            <a:spAutoFit/>
+          </a:bodyPr>
+          <a:lstStyle/>
+          <a:p>
+            <a:pPr>
+              <a:spcAft>
+                <a:spcPts val="600"/>
+              </a:spcAft>
+            </a:pPr>
+            <a:r>
+              <a:rPr sz="1500">
+                <a:solidFill>
+                  <a:srgbClr val="22282E"/>
+                </a:solidFill>
+              </a:rPr>
+              <a:t>•  MITRE ATT&amp;CK — Initial Access (TA0001). &lt;https://attack.mitre.org/tactics/TA0001/&gt; — taxonomía utilizada para distinguir T1133, T1190, T1078 y los demás caminos de entrada.</a:t>
+            </a:r>
+          </a:p>
+          <a:p>
+            <a:pPr>
+              <a:spcAft>
+                <a:spcPts val="600"/>
+              </a:spcAft>
+            </a:pPr>
+            <a:r>
+              <a:rPr sz="1500">
+                <a:solidFill>
+                  <a:srgbClr val="22282E"/>
+                </a:solidFill>
+              </a:rPr>
+              <a:t>•  NIST — Technical Guide to Information Security Testing and Assessment, SP 800-115. &lt;https://doi.org/10.6028/NIST.SP.800-115&gt; — sustenta la planificación, las reglas de enfrentamiento, el manejo…</a:t>
+            </a:r>
+          </a:p>
+          <a:p>
+            <a:pPr>
+              <a:spcAft>
+                <a:spcPts val="600"/>
+              </a:spcAft>
+            </a:pPr>
+            <a:r>
+              <a:rPr sz="1500">
+                <a:solidFill>
+                  <a:srgbClr val="22282E"/>
+                </a:solidFill>
+              </a:rPr>
+              <a:t>•  NetExec. &lt;https://github.com/Pennyw0rth/NetExec&gt; — documentación de la herramienta empleada únicamente en el laboratorio de autenticación.</a:t>
+            </a:r>
+          </a:p>
+          <a:p>
+            <a:pPr>
+              <a:spcAft>
+                <a:spcPts val="600"/>
+              </a:spcAft>
+            </a:pPr>
+            <a:r>
+              <a:rPr sz="1500">
+                <a:solidFill>
+                  <a:srgbClr val="22282E"/>
+                </a:solidFill>
+              </a:rPr>
+              <a:t>•  Kerbrute. &lt;https://github.com/ropnop/kerbrute&gt; — referencia del comportamiento y opciones de la herramienta de enumeración del laboratorio.</a:t>
+            </a:r>
+          </a:p>
+          <a:p>
+            <a:pPr>
+              <a:spcAft>
+                <a:spcPts val="600"/>
+              </a:spcAft>
+            </a:pPr>
+            <a:r>
+              <a:rPr sz="1500">
+                <a:solidFill>
+                  <a:srgbClr val="22282E"/>
+                </a:solidFill>
+              </a:rPr>
+              <a:t>•  Clark, B. — RTFM: Red Team Field Manual v2 — consulta operativa complementaria; la clasificación conceptual se toma de ATT&amp;CK y NIST.</a:t>
+            </a:r>
+          </a:p>
+        </p:txBody>
+      </p:sp>
+    </p:spTree>
+  </p:cSld>
+  <p:clrMapOvr>
+    <a:masterClrMapping/>
+  </p:clrMapOvr>
+</p:sld>
+</file>
+
+<file path=ppt/slides/slide15.xml><?xml version="1.0" encoding="utf-8"?>
+<p:sld xmlns:a="http://schemas.openxmlformats.org/drawingml/2006/main" xmlns:p="http://schemas.openxmlformats.org/presentationml/2006/main" xmlns:r="http://schemas.openxmlformats.org/officeDocument/2006/relationships">
+  <p:cSld>
+    <p:spTree>
+      <p:nvGrpSpPr>
+        <p:cNvPr id="1" name=""/>
+        <p:cNvGrpSpPr/>
+        <p:nvPr/>
+      </p:nvGrpSpPr>
+      <p:grpSpPr/>
+      <p:sp>
+        <p:nvSpPr>
+          <p:cNvPr id="2" name="TextBox 1"/>
+          <p:cNvSpPr txBox="1"/>
+          <p:nvPr/>
+        </p:nvSpPr>
+        <p:spPr>
+          <a:xfrm>
+            <a:off x="457200" y="274320"/>
+            <a:ext cx="8229600" cy="640080"/>
+          </a:xfrm>
+          <a:prstGeom prst="rect">
+            <a:avLst/>
+          </a:prstGeom>
+          <a:noFill/>
+        </p:spPr>
+        <p:txBody>
+          <a:bodyPr wrap="square">
+            <a:spAutoFit/>
+          </a:bodyPr>
+          <a:lstStyle/>
+          <a:p>
+            <a:r>
+              <a:rPr sz="2200" b="1">
+                <a:solidFill>
+                  <a:srgbClr val="0B3D2E"/>
+                </a:solidFill>
+              </a:rPr>
+              <a:t>Diagrama de la clase</a:t>
+            </a:r>
+          </a:p>
+        </p:txBody>
+      </p:sp>
+      <p:pic>
+        <p:nvPicPr>
+          <p:cNvPr id="3" name="Picture 2" descr="b2df8a24226d2c01.png"/>
+          <p:cNvPicPr>
+            <a:picLocks noChangeAspect="1"/>
+          </p:cNvPicPr>
+          <p:nvPr/>
+        </p:nvPicPr>
+        <p:blipFill>
+          <a:blip r:embed="rId2"/>
+          <a:stretch>
+            <a:fillRect/>
+          </a:stretch>
+        </p:blipFill>
+        <p:spPr>
+          <a:xfrm>
+            <a:off x="457200" y="3204972"/>
+            <a:ext cx="8229600" cy="1088136"/>
+          </a:xfrm>
+          <a:prstGeom prst="rect">
+            <a:avLst/>
+          </a:prstGeom>
+        </p:spPr>
+      </p:pic>
     </p:spTree>
   </p:cSld>
   <p:clrMapOvr>
@@ -3683,7 +4044,7 @@
                   <a:srgbClr val="22282E"/>
                 </a:solidFill>
               </a:rPr>
-              <a:t>•  Cubrir el abanico de técnicas de acceso inicial más allá del phishing: servicios expuestos, credenciales válidas, abuso de aplicaciones de cara a internet, drive-by y supply chain. El alumno aprenderá a elegir el vector según el objetivo y a establecer el primer punto de apoyo (foothold) de forma sigilosa en su laboratorio.</a:t>
+              <a:t>•  Cubrir el abanico de técnicas de acceso inicial más allá del phishing: servicios expuestos, credenciales válidas, abuso de aplicaciones de cara a internet, drive-by y supply chain. El alumno…</a:t>
             </a:r>
           </a:p>
         </p:txBody>
@@ -4077,7 +4438,7 @@
                   <a:srgbClr val="0B3D2E"/>
                 </a:solidFill>
               </a:rPr>
-              <a:t>📖 Definiciones y características</a:t>
+              <a:t>🧠 Explicación en profundidad</a:t>
             </a:r>
           </a:p>
         </p:txBody>
@@ -4115,82 +4476,97 @@
                   <a:srgbClr val="22282E"/>
                 </a:solidFill>
               </a:rPr>
-              <a:t>•  External Remote Services (T1133): acceso vía servicios remotos expuestos (RDP, VPN, Citrix). Característica: no requiere malware, solo credenciales.</a:t>
-            </a:r>
-          </a:p>
-          <a:p>
-            <a:pPr>
-              <a:spcAft>
-                <a:spcPts val="600"/>
-              </a:spcAft>
-            </a:pPr>
-            <a:r>
-              <a:rPr sz="1500">
-                <a:solidFill>
-                  <a:srgbClr val="22282E"/>
-                </a:solidFill>
-              </a:rPr>
-              <a:t>•  Exploit Public-Facing Application (T1190): explotar una vulnerabilidad en un servicio accesible. Característica: entrada directa sin interacción del usuario.</a:t>
-            </a:r>
-          </a:p>
-          <a:p>
-            <a:pPr>
-              <a:spcAft>
-                <a:spcPts val="600"/>
-              </a:spcAft>
-            </a:pPr>
-            <a:r>
-              <a:rPr sz="1500">
-                <a:solidFill>
-                  <a:srgbClr val="22282E"/>
-                </a:solidFill>
-              </a:rPr>
-              <a:t>•  Valid Accounts (T1078): usar credenciales legítimas obtenidas. Característica: muy sigiloso, "parece" un login normal.</a:t>
-            </a:r>
-          </a:p>
-          <a:p>
-            <a:pPr>
-              <a:spcAft>
-                <a:spcPts val="600"/>
-              </a:spcAft>
-            </a:pPr>
-            <a:r>
-              <a:rPr sz="1500">
-                <a:solidFill>
-                  <a:srgbClr val="22282E"/>
-                </a:solidFill>
-              </a:rPr>
-              <a:t>•  Password spraying: probar 1–2 contraseñas comunes contra muchos usuarios. Característica: evita bloqueos por intentos.</a:t>
-            </a:r>
-          </a:p>
-          <a:p>
-            <a:pPr>
-              <a:spcAft>
-                <a:spcPts val="600"/>
-              </a:spcAft>
-            </a:pPr>
-            <a:r>
-              <a:rPr sz="1500">
-                <a:solidFill>
-                  <a:srgbClr val="22282E"/>
-                </a:solidFill>
-              </a:rPr>
-              <a:t>•  Foothold: primer punto de apoyo controlado en la red objetivo. Característica: base para pivotar y escalar.</a:t>
-            </a:r>
-          </a:p>
-          <a:p>
-            <a:pPr>
-              <a:spcAft>
-                <a:spcPts val="600"/>
-              </a:spcAft>
-            </a:pPr>
-            <a:r>
-              <a:rPr sz="1500">
-                <a:solidFill>
-                  <a:srgbClr val="22282E"/>
-                </a:solidFill>
-              </a:rPr>
-              <a:t>•  Drive-by compromise (T1189): comprometer al usuario al visitar un sitio. Característica: indirecto y oportunista.</a:t>
+              <a:t>•  MITRE ATT&amp;CK llama Initial Access al conjunto de técnicas empleadas para entrar en una red. La distinción es importante: demostrar que una credencial funciona o que una aplicación responde a una…</a:t>
+            </a:r>
+          </a:p>
+          <a:p>
+            <a:pPr>
+              <a:spcAft>
+                <a:spcPts val="600"/>
+              </a:spcAft>
+            </a:pPr>
+            <a:r>
+              <a:rPr sz="1500">
+                <a:solidFill>
+                  <a:srgbClr val="22282E"/>
+                </a:solidFill>
+              </a:rPr>
+              <a:t>•  El vector tampoco se elige solo por su probabilidad de éxito. Se compara con las reglas de enfrentamiento, el objetivo de la prueba y el posible impacto. Una aplicación pública vulnerable puede…</a:t>
+            </a:r>
+          </a:p>
+          <a:p>
+            <a:pPr>
+              <a:spcAft>
+                <a:spcPts val="600"/>
+              </a:spcAft>
+            </a:pPr>
+            <a:r>
+              <a:rPr sz="1500">
+                <a:solidFill>
+                  <a:srgbClr val="22282E"/>
+                </a:solidFill>
+              </a:rPr>
+              <a:t>•  Enumerar puertos sin contexto produce una lista, no una decisión. Cada hallazgo debe convertirse en una hipótesis: «el portal VPN acepta identidades del dominio y carece del control acordado» o «la…</a:t>
+            </a:r>
+          </a:p>
+          <a:p>
+            <a:pPr>
+              <a:spcAft>
+                <a:spcPts val="600"/>
+              </a:spcAft>
+            </a:pPr>
+            <a:r>
+              <a:rPr sz="1500">
+                <a:solidFill>
+                  <a:srgbClr val="22282E"/>
+                </a:solidFill>
+              </a:rPr>
+              <a:t>•  En T1133, el objeto de estudio es un servicio remoto accesible desde fuera del perímetro. En T1190, la condición inicial es una aplicación expuesta y una debilidad validable. En T1078, lo…</a:t>
+            </a:r>
+          </a:p>
+          <a:p>
+            <a:pPr>
+              <a:spcAft>
+                <a:spcPts val="600"/>
+              </a:spcAft>
+            </a:pPr>
+            <a:r>
+              <a:rPr sz="1500">
+                <a:solidFill>
+                  <a:srgbClr val="22282E"/>
+                </a:solidFill>
+              </a:rPr>
+              <a:t>•  El spraying distribuye una misma contraseña entre varias identidades, a diferencia del ataque que concentra muchas contraseñas sobre una cuenta. Esa distribución puede reducir la probabilidad de…</a:t>
+            </a:r>
+          </a:p>
+          <a:p>
+            <a:pPr>
+              <a:spcAft>
+                <a:spcPts val="600"/>
+              </a:spcAft>
+            </a:pPr>
+            <a:r>
+              <a:rPr sz="1500">
+                <a:solidFill>
+                  <a:srgbClr val="22282E"/>
+                </a:solidFill>
+              </a:rPr>
+              <a:t>•  Antes de una prueba autorizada se obtienen la política de bloqueo, la ventana de observación, las cuentas excluidas y un contacto de emergencia. El ritmo no se «adivina»: se acuerda. El resultado…</a:t>
+            </a:r>
+          </a:p>
+          <a:p>
+            <a:pPr>
+              <a:spcAft>
+                <a:spcPts val="600"/>
+              </a:spcAft>
+            </a:pPr>
+            <a:r>
+              <a:rPr sz="1500">
+                <a:solidFill>
+                  <a:srgbClr val="22282E"/>
+                </a:solidFill>
+              </a:rPr>
+              <a:t>•  Un foothold bien documentado responde cuatro preguntas: qué identidad o proceso se controla, en qué activo, con qué privilegios y durante cuánto tiempo. También conserva el instante, origen, técnica…</a:t>
             </a:r>
           </a:p>
         </p:txBody>
@@ -4241,7 +4617,7 @@
                   <a:srgbClr val="0B3D2E"/>
                 </a:solidFill>
               </a:rPr>
-              <a:t>🧰 Herramientas y preparación</a:t>
+              <a:t>📖 Definiciones y características</a:t>
             </a:r>
           </a:p>
         </p:txBody>
@@ -4279,52 +4655,82 @@
                   <a:srgbClr val="22282E"/>
                 </a:solidFill>
               </a:rPr>
-              <a:t>•  Máquinas de laboratorio con servicios expuestos deliberadamente (una web vulnerable, RDP, un VPN de lab).</a:t>
-            </a:r>
-          </a:p>
-          <a:p>
-            <a:pPr>
-              <a:spcAft>
-                <a:spcPts val="600"/>
-              </a:spcAft>
-            </a:pPr>
-            <a:r>
-              <a:rPr sz="1500">
-                <a:solidFill>
-                  <a:srgbClr val="22282E"/>
-                </a:solidFill>
-              </a:rPr>
-              <a:t>•  nmap, ffuf/gobuster para descubrir superficie; herramientas de la Parte 4 (web) y Parte 5 (explotación).</a:t>
-            </a:r>
-          </a:p>
-          <a:p>
-            <a:pPr>
-              <a:spcAft>
-                <a:spcPts val="600"/>
-              </a:spcAft>
-            </a:pPr>
-            <a:r>
-              <a:rPr sz="1500">
-                <a:solidFill>
-                  <a:srgbClr val="22282E"/>
-                </a:solidFill>
-              </a:rPr>
-              <a:t>•  Para spraying en AD: kerbrute, NetExec (nxc) contra el DC del lab.</a:t>
-            </a:r>
-          </a:p>
-          <a:p>
-            <a:pPr>
-              <a:spcAft>
-                <a:spcPts val="600"/>
-              </a:spcAft>
-            </a:pPr>
-            <a:r>
-              <a:rPr sz="1500">
-                <a:solidFill>
-                  <a:srgbClr val="22282E"/>
-                </a:solidFill>
-              </a:rPr>
-              <a:t>•  El C2 de las clases anteriores para convertir el acceso en sesión.</a:t>
+              <a:t>•  External Remote Services (T1133): acceso vía servicios remotos expuestos (RDP, VPN, Citrix). Característica: no requiere malware, solo credenciales.</a:t>
+            </a:r>
+          </a:p>
+          <a:p>
+            <a:pPr>
+              <a:spcAft>
+                <a:spcPts val="600"/>
+              </a:spcAft>
+            </a:pPr>
+            <a:r>
+              <a:rPr sz="1500">
+                <a:solidFill>
+                  <a:srgbClr val="22282E"/>
+                </a:solidFill>
+              </a:rPr>
+              <a:t>•  Exploit Public-Facing Application (T1190): explotar una vulnerabilidad en un servicio accesible. Característica: entrada directa sin interacción del usuario.</a:t>
+            </a:r>
+          </a:p>
+          <a:p>
+            <a:pPr>
+              <a:spcAft>
+                <a:spcPts val="600"/>
+              </a:spcAft>
+            </a:pPr>
+            <a:r>
+              <a:rPr sz="1500">
+                <a:solidFill>
+                  <a:srgbClr val="22282E"/>
+                </a:solidFill>
+              </a:rPr>
+              <a:t>•  Valid Accounts (T1078): usar credenciales legítimas obtenidas. Característica: puede mezclarse con actividad normal, pero el origen, dispositivo, horario y patrón siguen siendo detectables.</a:t>
+            </a:r>
+          </a:p>
+          <a:p>
+            <a:pPr>
+              <a:spcAft>
+                <a:spcPts val="600"/>
+              </a:spcAft>
+            </a:pPr>
+            <a:r>
+              <a:rPr sz="1500">
+                <a:solidFill>
+                  <a:srgbClr val="22282E"/>
+                </a:solidFill>
+              </a:rPr>
+              <a:t>•  Password spraying: probar un número muy limitado de contraseñas contra varias identidades. Característica: distribuye intentos, pero aún puede bloquear cuentas y ser correlacionado.</a:t>
+            </a:r>
+          </a:p>
+          <a:p>
+            <a:pPr>
+              <a:spcAft>
+                <a:spcPts val="600"/>
+              </a:spcAft>
+            </a:pPr>
+            <a:r>
+              <a:rPr sz="1500">
+                <a:solidFill>
+                  <a:srgbClr val="22282E"/>
+                </a:solidFill>
+              </a:rPr>
+              <a:t>•  Foothold: primer punto de apoyo controlado en la red objetivo. Característica: base para pivotar y escalar.</a:t>
+            </a:r>
+          </a:p>
+          <a:p>
+            <a:pPr>
+              <a:spcAft>
+                <a:spcPts val="600"/>
+              </a:spcAft>
+            </a:pPr>
+            <a:r>
+              <a:rPr sz="1500">
+                <a:solidFill>
+                  <a:srgbClr val="22282E"/>
+                </a:solidFill>
+              </a:rPr>
+              <a:t>•  Drive-by compromise (T1189): comprometer al usuario al visitar un sitio. Característica: indirecto y oportunista.</a:t>
             </a:r>
           </a:p>
         </p:txBody>
@@ -4375,7 +4781,7 @@
                   <a:srgbClr val="0B3D2E"/>
                 </a:solidFill>
               </a:rPr>
-              <a:t>🧪 Laboratorio guiado</a:t>
+              <a:t>📔 Glosario</a:t>
             </a:r>
           </a:p>
         </p:txBody>
@@ -4413,97 +4819,97 @@
                   <a:srgbClr val="22282E"/>
                 </a:solidFill>
               </a:rPr>
-              <a:t>•  Mapea la superficie. nmap -sV -p- 10.10.10.0/24 en tu lab para localizar servicios expuestos (web, RDP, SMB, VPN).</a:t>
-            </a:r>
-          </a:p>
-          <a:p>
-            <a:pPr>
-              <a:spcAft>
-                <a:spcPts val="600"/>
-              </a:spcAft>
-            </a:pPr>
-            <a:r>
-              <a:rPr sz="1500">
-                <a:solidFill>
-                  <a:srgbClr val="22282E"/>
-                </a:solidFill>
-              </a:rPr>
-              <a:t>•  Explota un servicio público. Toma la web vulnerable del lab y consigue ejecución (reutiliza técnicas de la Parte 4/5); confirma un shell.</a:t>
-            </a:r>
-          </a:p>
-          <a:p>
-            <a:pPr>
-              <a:spcAft>
-                <a:spcPts val="600"/>
-              </a:spcAft>
-            </a:pPr>
-            <a:r>
-              <a:rPr sz="1500">
-                <a:solidFill>
-                  <a:srgbClr val="22282E"/>
-                </a:solidFill>
-              </a:rPr>
-              <a:t>•  Enumera usuarios para spraying. Contra el DC de laboratorio:</a:t>
-            </a:r>
-          </a:p>
-          <a:p>
-            <a:pPr>
-              <a:spcAft>
-                <a:spcPts val="600"/>
-              </a:spcAft>
-            </a:pPr>
-            <a:r>
-              <a:rPr sz="1500">
-                <a:solidFill>
-                  <a:srgbClr val="22282E"/>
-                </a:solidFill>
-              </a:rPr>
-              <a:t>•  kerbrute userenum -d lab.local --dc 10.10.10.10 users.txt</a:t>
-            </a:r>
-          </a:p>
-          <a:p>
-            <a:pPr>
-              <a:spcAft>
-                <a:spcPts val="600"/>
-              </a:spcAft>
-            </a:pPr>
-            <a:r>
-              <a:rPr sz="1500">
-                <a:solidFill>
-                  <a:srgbClr val="22282E"/>
-                </a:solidFill>
-              </a:rPr>
-              <a:t>•  Password spraying controlado. Una sola contraseña por ronda para evitar lockout:</a:t>
-            </a:r>
-          </a:p>
-          <a:p>
-            <a:pPr>
-              <a:spcAft>
-                <a:spcPts val="600"/>
-              </a:spcAft>
-            </a:pPr>
-            <a:r>
-              <a:rPr sz="1500">
-                <a:solidFill>
-                  <a:srgbClr val="22282E"/>
-                </a:solidFill>
-              </a:rPr>
-              <a:t>•  nxc smb 10.10.10.10 -u users.txt -p 'Oto2026!' --continue-on-success</a:t>
-            </a:r>
-          </a:p>
-          <a:p>
-            <a:pPr>
-              <a:spcAft>
-                <a:spcPts val="600"/>
-              </a:spcAft>
-            </a:pPr>
-            <a:r>
-              <a:rPr sz="1500">
-                <a:solidFill>
-                  <a:srgbClr val="22282E"/>
-                </a:solidFill>
-              </a:rPr>
-              <a:t>•  Valida credenciales. Con un par válido, comprueba acceso SMB/WinRM: nxc winrm 10.10.10.20 -u user -p 'Oto2026!'.</a:t>
+              <a:t>•  Superficie expuesta: activos y servicios alcanzables desde el punto de partida autorizado.</a:t>
+            </a:r>
+          </a:p>
+          <a:p>
+            <a:pPr>
+              <a:spcAft>
+                <a:spcPts val="600"/>
+              </a:spcAft>
+            </a:pPr>
+            <a:r>
+              <a:rPr sz="1500">
+                <a:solidFill>
+                  <a:srgbClr val="22282E"/>
+                </a:solidFill>
+              </a:rPr>
+              <a:t>•  Vector de acceso: camino concreto que conecta una condición inicial con la entrada al entorno.</a:t>
+            </a:r>
+          </a:p>
+          <a:p>
+            <a:pPr>
+              <a:spcAft>
+                <a:spcPts val="600"/>
+              </a:spcAft>
+            </a:pPr>
+            <a:r>
+              <a:rPr sz="1500">
+                <a:solidFill>
+                  <a:srgbClr val="22282E"/>
+                </a:solidFill>
+              </a:rPr>
+              <a:t>•  Hipótesis de acceso: afirmación comprobable que relaciona un activo, una debilidad y un resultado esperado.</a:t>
+            </a:r>
+          </a:p>
+          <a:p>
+            <a:pPr>
+              <a:spcAft>
+                <a:spcPts val="600"/>
+              </a:spcAft>
+            </a:pPr>
+            <a:r>
+              <a:rPr sz="1500">
+                <a:solidFill>
+                  <a:srgbClr val="22282E"/>
+                </a:solidFill>
+              </a:rPr>
+              <a:t>•  Foothold: acceso inicial confirmado y suficientemente estable para la siguiente actividad autorizada.</a:t>
+            </a:r>
+          </a:p>
+          <a:p>
+            <a:pPr>
+              <a:spcAft>
+                <a:spcPts val="600"/>
+              </a:spcAft>
+            </a:pPr>
+            <a:r>
+              <a:rPr sz="1500">
+                <a:solidFill>
+                  <a:srgbClr val="22282E"/>
+                </a:solidFill>
+              </a:rPr>
+              <a:t>•  Cuenta válida: identidad legítima empleada fuera del uso previsto o sin los controles esperados.</a:t>
+            </a:r>
+          </a:p>
+          <a:p>
+            <a:pPr>
+              <a:spcAft>
+                <a:spcPts val="600"/>
+              </a:spcAft>
+            </a:pPr>
+            <a:r>
+              <a:rPr sz="1500">
+                <a:solidFill>
+                  <a:srgbClr val="22282E"/>
+                </a:solidFill>
+              </a:rPr>
+              <a:t>•  Password spraying: prueba de una contraseña limitada sobre varias cuentas; no debe confundirse con fuerza bruta por cuenta.</a:t>
+            </a:r>
+          </a:p>
+          <a:p>
+            <a:pPr>
+              <a:spcAft>
+                <a:spcPts val="600"/>
+              </a:spcAft>
+            </a:pPr>
+            <a:r>
+              <a:rPr sz="1500">
+                <a:solidFill>
+                  <a:srgbClr val="22282E"/>
+                </a:solidFill>
+              </a:rPr>
+              <a:t>•  Política de bloqueo: reglas que determinan umbrales, duración y restablecimiento tras fallos de autenticación.</a:t>
             </a:r>
           </a:p>
         </p:txBody>
@@ -4554,7 +4960,7 @@
                   <a:srgbClr val="0B3D2E"/>
                 </a:solidFill>
               </a:rPr>
-              <a:t>✍️ Ejercicios</a:t>
+              <a:t>🧰 Herramientas y preparación</a:t>
             </a:r>
           </a:p>
         </p:txBody>
@@ -4592,82 +4998,52 @@
                   <a:srgbClr val="22282E"/>
                 </a:solidFill>
               </a:rPr>
-              <a:t>•  Lista 6 técnicas de Initial Access con su ID de ATT&amp;CK.</a:t>
-            </a:r>
-          </a:p>
-          <a:p>
-            <a:pPr>
-              <a:spcAft>
-                <a:spcPts val="600"/>
-              </a:spcAft>
-            </a:pPr>
-            <a:r>
-              <a:rPr sz="1500">
-                <a:solidFill>
-                  <a:srgbClr val="22282E"/>
-                </a:solidFill>
-              </a:rPr>
-              <a:t>•  Explica por qué Valid Accounts es más sigiloso que explotar un servicio.</a:t>
-            </a:r>
-          </a:p>
-          <a:p>
-            <a:pPr>
-              <a:spcAft>
-                <a:spcPts val="600"/>
-              </a:spcAft>
-            </a:pPr>
-            <a:r>
-              <a:rPr sz="1500">
-                <a:solidFill>
-                  <a:srgbClr val="22282E"/>
-                </a:solidFill>
-              </a:rPr>
-              <a:t>•  Diseña una campaña de password spraying que no bloquee cuentas (calcula el timing según la política de lockout).</a:t>
-            </a:r>
-          </a:p>
-          <a:p>
-            <a:pPr>
-              <a:spcAft>
-                <a:spcPts val="600"/>
-              </a:spcAft>
-            </a:pPr>
-            <a:r>
-              <a:rPr sz="1500">
-                <a:solidFill>
-                  <a:srgbClr val="22282E"/>
-                </a:solidFill>
-              </a:rPr>
-              <a:t>•  Compara el riesgo de detección de T1190 frente a T1078.</a:t>
-            </a:r>
-          </a:p>
-          <a:p>
-            <a:pPr>
-              <a:spcAft>
-                <a:spcPts val="600"/>
-              </a:spcAft>
-            </a:pPr>
-            <a:r>
-              <a:rPr sz="1500">
-                <a:solidFill>
-                  <a:srgbClr val="22282E"/>
-                </a:solidFill>
-              </a:rPr>
-              <a:t>•  Consigue un foothold en el lab por dos vectores distintos y compáralos.</a:t>
-            </a:r>
-          </a:p>
-          <a:p>
-            <a:pPr>
-              <a:spcAft>
-                <a:spcPts val="600"/>
-              </a:spcAft>
-            </a:pPr>
-            <a:r>
-              <a:rPr sz="1500">
-                <a:solidFill>
-                  <a:srgbClr val="22282E"/>
-                </a:solidFill>
-              </a:rPr>
-              <a:t>•  Investiga un caso real de acceso inicial por supply chain y resúmelo.</a:t>
+              <a:t>•  Máquinas de laboratorio con servicios expuestos deliberadamente (una web vulnerable, RDP, un VPN de lab).</a:t>
+            </a:r>
+          </a:p>
+          <a:p>
+            <a:pPr>
+              <a:spcAft>
+                <a:spcPts val="600"/>
+              </a:spcAft>
+            </a:pPr>
+            <a:r>
+              <a:rPr sz="1500">
+                <a:solidFill>
+                  <a:srgbClr val="22282E"/>
+                </a:solidFill>
+              </a:rPr>
+              <a:t>•  nmap, ffuf/gobuster para descubrir superficie; herramientas de la Parte 4 (web) y Parte 5 (explotación).</a:t>
+            </a:r>
+          </a:p>
+          <a:p>
+            <a:pPr>
+              <a:spcAft>
+                <a:spcPts val="600"/>
+              </a:spcAft>
+            </a:pPr>
+            <a:r>
+              <a:rPr sz="1500">
+                <a:solidFill>
+                  <a:srgbClr val="22282E"/>
+                </a:solidFill>
+              </a:rPr>
+              <a:t>•  Para spraying en AD: kerbrute, NetExec (nxc) contra el DC del lab.</a:t>
+            </a:r>
+          </a:p>
+          <a:p>
+            <a:pPr>
+              <a:spcAft>
+                <a:spcPts val="600"/>
+              </a:spcAft>
+            </a:pPr>
+            <a:r>
+              <a:rPr sz="1500">
+                <a:solidFill>
+                  <a:srgbClr val="22282E"/>
+                </a:solidFill>
+              </a:rPr>
+              <a:t>•  El C2 de las clases anteriores para convertir el acceso en sesión.</a:t>
             </a:r>
           </a:p>
         </p:txBody>
@@ -4718,7 +5094,7 @@
                   <a:srgbClr val="0B3D2E"/>
                 </a:solidFill>
               </a:rPr>
-              <a:t>📝 Reto verificable</a:t>
+              <a:t>🧪 Laboratorio guiado</a:t>
             </a:r>
           </a:p>
         </p:txBody>
@@ -4756,22 +5132,97 @@
                   <a:srgbClr val="22282E"/>
                 </a:solidFill>
               </a:rPr>
-              <a:t>•  Obtén un foothold con sesión C2 en una máquina de tu laboratorio a través de un vector de Initial Access que no sea phishing, documentando la técnica ATT&amp;CK usada.</a:t>
-            </a:r>
-          </a:p>
-          <a:p>
-            <a:pPr>
-              <a:spcAft>
-                <a:spcPts val="600"/>
-              </a:spcAft>
-            </a:pPr>
-            <a:r>
-              <a:rPr sz="1500">
-                <a:solidFill>
-                  <a:srgbClr val="22282E"/>
-                </a:solidFill>
-              </a:rPr>
-              <a:t>•  Criterio de aceptación: existe una sesión C2 activa originada por el vector elegido (servicio expuesto o credenciales válidas), presentas el ID ATT&amp;CK correspondiente y explicas cómo evitaste bloqueos/ruido innecesario.</a:t>
+              <a:t>•  Mapea la superficie. nmap -sV -p- 10.10.10.0/24 en tu lab para localizar servicios expuestos (web, RDP, SMB, VPN).</a:t>
+            </a:r>
+          </a:p>
+          <a:p>
+            <a:pPr>
+              <a:spcAft>
+                <a:spcPts val="600"/>
+              </a:spcAft>
+            </a:pPr>
+            <a:r>
+              <a:rPr sz="1500">
+                <a:solidFill>
+                  <a:srgbClr val="22282E"/>
+                </a:solidFill>
+              </a:rPr>
+              <a:t>•  Explota un servicio público. Toma la web vulnerable del lab y consigue ejecución (reutiliza técnicas de la Parte 4/5); confirma un shell.</a:t>
+            </a:r>
+          </a:p>
+          <a:p>
+            <a:pPr>
+              <a:spcAft>
+                <a:spcPts val="600"/>
+              </a:spcAft>
+            </a:pPr>
+            <a:r>
+              <a:rPr sz="1500">
+                <a:solidFill>
+                  <a:srgbClr val="22282E"/>
+                </a:solidFill>
+              </a:rPr>
+              <a:t>•  Enumera usuarios para spraying. Contra el DC de laboratorio:</a:t>
+            </a:r>
+          </a:p>
+          <a:p>
+            <a:pPr>
+              <a:spcAft>
+                <a:spcPts val="600"/>
+              </a:spcAft>
+            </a:pPr>
+            <a:r>
+              <a:rPr sz="1500">
+                <a:solidFill>
+                  <a:srgbClr val="22282E"/>
+                </a:solidFill>
+              </a:rPr>
+              <a:t>•  Password spraying controlado. Una sola contraseña por ronda para evitar lockout:</a:t>
+            </a:r>
+          </a:p>
+          <a:p>
+            <a:pPr>
+              <a:spcAft>
+                <a:spcPts val="600"/>
+              </a:spcAft>
+            </a:pPr>
+            <a:r>
+              <a:rPr sz="1500">
+                <a:solidFill>
+                  <a:srgbClr val="22282E"/>
+                </a:solidFill>
+              </a:rPr>
+              <a:t>•  Valida credenciales. Con un par válido, comprueba acceso SMB/WinRM: nxc winrm 10.10.10.20 -u user -p 'Oto2026!'.</a:t>
+            </a:r>
+          </a:p>
+          <a:p>
+            <a:pPr>
+              <a:spcAft>
+                <a:spcPts val="600"/>
+              </a:spcAft>
+            </a:pPr>
+            <a:r>
+              <a:rPr sz="1500">
+                <a:solidFill>
+                  <a:srgbClr val="22282E"/>
+                </a:solidFill>
+              </a:rPr>
+              <a:t>•  Establece el foothold. Entrega un implante C2 (Sliver) a la máquina comprometida y confirma la sesión a través del redirector.</a:t>
+            </a:r>
+          </a:p>
+          <a:p>
+            <a:pPr>
+              <a:spcAft>
+                <a:spcPts val="600"/>
+              </a:spcAft>
+            </a:pPr>
+            <a:r>
+              <a:rPr sz="1500">
+                <a:solidFill>
+                  <a:srgbClr val="22282E"/>
+                </a:solidFill>
+              </a:rPr>
+              <a:t>•  Documenta el vector elegido, su ID ATT&amp;CK y su nivel de sigilo relativo.</a:t>
             </a:r>
           </a:p>
         </p:txBody>
